--- a/OTC_Tracker_One_Pager.pptx
+++ b/OTC_Tracker_One_Pager.pptx
@@ -5196,7 +5196,7 @@
         <p:spPr>
           <a:xfrm>
             <a:off x="2167128" y="5157216"/>
-            <a:ext cx="1049711" cy="77724"/>
+            <a:ext cx="1031994" cy="77724"/>
           </a:xfrm>
           <a:prstGeom prst="roundRect">
             <a:avLst>
@@ -5267,7 +5267,7 @@
                 </a:solidFill>
                 <a:latin typeface="Segoe UI"/>
               </a:rPr>
-              <a:t>87.10%</a:t>
+              <a:t>85.63%</a:t>
             </a:r>
           </a:p>
         </p:txBody>
@@ -5366,7 +5366,7 @@
         <p:spPr>
           <a:xfrm>
             <a:off x="4012387" y="5157216"/>
-            <a:ext cx="330460" cy="77724"/>
+            <a:ext cx="361553" cy="77724"/>
           </a:xfrm>
           <a:prstGeom prst="roundRect">
             <a:avLst>
@@ -5437,7 +5437,7 @@
                 </a:solidFill>
                 <a:latin typeface="Segoe UI"/>
               </a:rPr>
-              <a:t>27.42%</a:t>
+              <a:t>30.00%</a:t>
             </a:r>
           </a:p>
         </p:txBody>
@@ -5536,7 +5536,7 @@
         <p:spPr>
           <a:xfrm>
             <a:off x="5857646" y="5157216"/>
-            <a:ext cx="174992" cy="77724"/>
+            <a:ext cx="203434" cy="77724"/>
           </a:xfrm>
           <a:prstGeom prst="roundRect">
             <a:avLst>
@@ -5607,7 +5607,7 @@
                 </a:solidFill>
                 <a:latin typeface="Segoe UI"/>
               </a:rPr>
-              <a:t>14.52%</a:t>
+              <a:t>16.88%</a:t>
             </a:r>
           </a:p>
         </p:txBody>
@@ -5706,7 +5706,7 @@
         <p:spPr>
           <a:xfrm>
             <a:off x="7702905" y="5157216"/>
-            <a:ext cx="145826" cy="77724"/>
+            <a:ext cx="113045" cy="77724"/>
           </a:xfrm>
           <a:prstGeom prst="roundRect">
             <a:avLst>
@@ -5777,7 +5777,7 @@
                 </a:solidFill>
                 <a:latin typeface="Segoe UI"/>
               </a:rPr>
-              <a:t>12.10%</a:t>
+              <a:t>9.38%</a:t>
             </a:r>
           </a:p>
         </p:txBody>
@@ -5876,11 +5876,11 @@
         <p:spPr>
           <a:xfrm>
             <a:off x="9548164" y="5157216"/>
-            <a:ext cx="97137" cy="77724"/>
-          </a:xfrm>
-          <a:prstGeom prst="roundRect">
-            <a:avLst>
-              <a:gd name="adj" fmla="val 49411"/>
+            <a:ext cx="73033" cy="77724"/>
+          </a:xfrm>
+          <a:prstGeom prst="roundRect">
+            <a:avLst>
+              <a:gd name="adj" fmla="val 52584"/>
             </a:avLst>
           </a:prstGeom>
           <a:solidFill>
@@ -5947,7 +5947,7 @@
                 </a:solidFill>
                 <a:latin typeface="Segoe UI"/>
               </a:rPr>
-              <a:t>8.06%</a:t>
+              <a:t>6.06%</a:t>
             </a:r>
           </a:p>
         </p:txBody>
@@ -5986,7 +5986,7 @@
                 </a:solidFill>
                 <a:latin typeface="Segoe UI"/>
               </a:rPr>
-              <a:t>The % is the share of the 124-point OTC Derivatives process universe each tool automates end-to-end (or nearly so) — everything outside it is still a manual process.</a:t>
+              <a:t>The % is the share of the 160-point OTC Derivatives process universe each tool automates end-to-end (or nearly so) — everything outside it is still a manual process.</a:t>
             </a:r>
           </a:p>
         </p:txBody>
